--- a/system-design-101/vi/lessons/sd-06-005/slides/sd-06-005.pptx
+++ b/system-design-101/vi/lessons/sd-06-005/slides/sd-06-005.pptx
@@ -1790,7 +1790,7 @@
         <p:spPr>
           <a:xfrm>
             <a:off x="914400" y="1428750"/>
-            <a:ext cx="16459200" cy="1238250"/>
+            <a:ext cx="16459200" cy="2505075"/>
           </a:xfrm>
           <a:prstGeom prst="rect">
             <a:avLst/>
@@ -1799,17 +1799,17 @@
           <a:ln/>
         </p:spPr>
         <p:txBody>
-          <a:bodyPr wrap="square" lIns="0" tIns="63638" rIns="0" bIns="-63638" rtlCol="0" anchor="ctr"/>
+          <a:bodyPr wrap="square" lIns="0" tIns="69437" rIns="0" bIns="-69437" rtlCol="0" anchor="t"/>
           <a:lstStyle/>
           <a:p>
             <a:pPr algn="l" indent="0" marL="0">
               <a:lnSpc>
-                <a:spcPts val="7794"/>
+                <a:spcPts val="8505"/>
               </a:lnSpc>
               <a:buNone/>
             </a:pPr>
             <a:r>
-              <a:rPr lang="en-US" sz="7423" dirty="0" spc="-25" kern="0">
+              <a:rPr lang="en-US" sz="8100" dirty="0" spc="-29" kern="0">
                 <a:solidFill>
                   <a:srgbClr val="F3EEE3"/>
                 </a:solidFill>
@@ -1820,7 +1820,7 @@
               <a:t>Redis</a:t>
             </a:r>
             <a:r>
-              <a:rPr lang="en-US" sz="7423" dirty="0" spc="-9" kern="0">
+              <a:rPr lang="en-US" sz="8100" dirty="0" spc="-12" kern="0">
                 <a:solidFill>
                   <a:srgbClr val="F3EEE3"/>
                 </a:solidFill>
@@ -1831,7 +1831,7 @@
               <a:t> 101:</a:t>
             </a:r>
             <a:r>
-              <a:rPr lang="en-US" sz="7423" dirty="0" spc="1" kern="0">
+              <a:rPr lang="en-US" sz="8100" dirty="0" spc="2" kern="0">
                 <a:solidFill>
                   <a:srgbClr val="F3EEE3"/>
                 </a:solidFill>
@@ -1842,7 +1842,7 @@
               <a:t> chạy</a:t>
             </a:r>
             <a:r>
-              <a:rPr lang="en-US" sz="7423" dirty="0" spc="-3" kern="0">
+              <a:rPr lang="en-US" sz="8100" dirty="0" spc="1" kern="0">
                 <a:solidFill>
                   <a:srgbClr val="F3EEE3"/>
                 </a:solidFill>
@@ -1853,7 +1853,7 @@
               <a:t> thử</a:t>
             </a:r>
             <a:r>
-              <a:rPr lang="en-US" sz="7423" dirty="0" spc="6" kern="0">
+              <a:rPr lang="en-US" sz="8100" dirty="0" spc="9" kern="0">
                 <a:solidFill>
                   <a:srgbClr val="F3EEE3"/>
                 </a:solidFill>
@@ -1864,7 +1864,7 @@
               <a:t> từng</a:t>
             </a:r>
             <a:r>
-              <a:rPr lang="en-US" sz="7423" dirty="0" spc="27" kern="0">
+              <a:rPr lang="en-US" sz="8100" dirty="0" spc="29" kern="0">
                 <a:solidFill>
                   <a:srgbClr val="F3EEE3"/>
                 </a:solidFill>
@@ -1874,7 +1874,29 @@
               </a:rPr>
               <a:t> điều</a:t>
             </a:r>
-            <a:endParaRPr lang="en-US" sz="7423" dirty="0"/>
+            <a:r>
+              <a:rPr lang="en-US" sz="8100" dirty="0" spc="-1" kern="0">
+                <a:solidFill>
+                  <a:srgbClr val="F3EEE3"/>
+                </a:solidFill>
+                <a:latin typeface="Bricolage Grotesque ExtraBold" pitchFamily="34" charset="0"/>
+                <a:ea typeface="Bricolage Grotesque ExtraBold" pitchFamily="34" charset="-122"/>
+                <a:cs typeface="Bricolage Grotesque ExtraBold" pitchFamily="34" charset="-120"/>
+              </a:rPr>
+              <a:t> cơ</a:t>
+            </a:r>
+            <a:r>
+              <a:rPr lang="en-US" sz="8100" dirty="0" spc="-5" kern="0">
+                <a:solidFill>
+                  <a:srgbClr val="F3EEE3"/>
+                </a:solidFill>
+                <a:latin typeface="Bricolage Grotesque ExtraBold" pitchFamily="34" charset="0"/>
+                <a:ea typeface="Bricolage Grotesque ExtraBold" pitchFamily="34" charset="-122"/>
+                <a:cs typeface="Bricolage Grotesque ExtraBold" pitchFamily="34" charset="-120"/>
+              </a:rPr>
+              <a:t> bản</a:t>
+            </a:r>
+            <a:endParaRPr lang="en-US" sz="8100" dirty="0"/>
           </a:p>
         </p:txBody>
       </p:sp>
@@ -1886,7 +1908,7 @@
         </p:nvSpPr>
         <p:spPr>
           <a:xfrm>
-            <a:off x="914400" y="2857500"/>
+            <a:off x="914400" y="4000500"/>
             <a:ext cx="16459200" cy="571500"/>
           </a:xfrm>
           <a:prstGeom prst="rect">
@@ -2024,12 +2046,12 @@
         </p:nvSpPr>
         <p:spPr>
           <a:xfrm>
-            <a:off x="914400" y="4286250"/>
-            <a:ext cx="4000500" cy="1143000"/>
+            <a:off x="914400" y="5143500"/>
+            <a:ext cx="4000500" cy="1000125"/>
           </a:xfrm>
           <a:prstGeom prst="roundRect">
             <a:avLst>
-              <a:gd name="adj" fmla="val 20000"/>
+              <a:gd name="adj" fmla="val 22857"/>
             </a:avLst>
           </a:prstGeom>
           <a:solidFill>
@@ -2088,14 +2110,14 @@
       </p:sp>
       <p:sp>
         <p:nvSpPr>
-          <p:cNvPr id="6" name="Connector line-1792370998380-155875119"/>
-          <p:cNvSpPr/>
-          <p:nvPr/>
-        </p:nvSpPr>
-        <p:spPr>
-          <a:xfrm>
-            <a:off x="5010150" y="4857750"/>
-            <a:ext cx="1809750" cy="857250"/>
+          <p:cNvPr id="6" name="Connector line-1792371720912-653875980"/>
+          <p:cNvSpPr/>
+          <p:nvPr/>
+        </p:nvSpPr>
+        <p:spPr>
+          <a:xfrm>
+            <a:off x="5010150" y="5638800"/>
+            <a:ext cx="1809750" cy="1238250"/>
           </a:xfrm>
           <a:prstGeom prst="line">
             <a:avLst/>
@@ -2119,12 +2141,12 @@
         </p:nvSpPr>
         <p:spPr>
           <a:xfrm>
-            <a:off x="914400" y="5715000"/>
-            <a:ext cx="4000500" cy="1143000"/>
+            <a:off x="914400" y="6381750"/>
+            <a:ext cx="4000500" cy="1000125"/>
           </a:xfrm>
           <a:prstGeom prst="roundRect">
             <a:avLst>
-              <a:gd name="adj" fmla="val 20000"/>
+              <a:gd name="adj" fmla="val 22857"/>
             </a:avLst>
           </a:prstGeom>
           <a:solidFill>
@@ -2183,14 +2205,14 @@
       </p:sp>
       <p:sp>
         <p:nvSpPr>
-          <p:cNvPr id="8" name="Connector line-1792370998384-32624413"/>
-          <p:cNvSpPr/>
-          <p:nvPr/>
-        </p:nvSpPr>
-        <p:spPr>
-          <a:xfrm flipV="1">
-            <a:off x="5010150" y="5715000"/>
-            <a:ext cx="1809750" cy="571500"/>
+          <p:cNvPr id="8" name="Connector line-1792371720915-114814407"/>
+          <p:cNvSpPr/>
+          <p:nvPr/>
+        </p:nvSpPr>
+        <p:spPr>
+          <a:xfrm>
+            <a:off x="5010150" y="6877050"/>
+            <a:ext cx="1809750" cy="0"/>
           </a:xfrm>
           <a:prstGeom prst="line">
             <a:avLst/>
@@ -2214,12 +2236,12 @@
         </p:nvSpPr>
         <p:spPr>
           <a:xfrm>
-            <a:off x="914400" y="7143750"/>
-            <a:ext cx="4000500" cy="1143000"/>
+            <a:off x="914400" y="7620000"/>
+            <a:ext cx="4000500" cy="1000125"/>
           </a:xfrm>
           <a:prstGeom prst="roundRect">
             <a:avLst>
-              <a:gd name="adj" fmla="val 20000"/>
+              <a:gd name="adj" fmla="val 22857"/>
             </a:avLst>
           </a:prstGeom>
           <a:solidFill>
@@ -2278,14 +2300,14 @@
       </p:sp>
       <p:sp>
         <p:nvSpPr>
-          <p:cNvPr id="10" name="Connector line-1792370998387-703155831"/>
+          <p:cNvPr id="10" name="Connector line-1792371720918-920692148"/>
           <p:cNvSpPr/>
           <p:nvPr/>
         </p:nvSpPr>
         <p:spPr>
           <a:xfrm flipV="1">
-            <a:off x="5010150" y="5715000"/>
-            <a:ext cx="1809750" cy="2000250"/>
+            <a:off x="5010150" y="6877050"/>
+            <a:ext cx="1809750" cy="1238250"/>
           </a:xfrm>
           <a:prstGeom prst="line">
             <a:avLst/>
@@ -2309,12 +2331,12 @@
         </p:nvSpPr>
         <p:spPr>
           <a:xfrm>
-            <a:off x="6953250" y="4476750"/>
-            <a:ext cx="5334000" cy="2476500"/>
+            <a:off x="6953250" y="5667375"/>
+            <a:ext cx="5334000" cy="2428875"/>
           </a:xfrm>
           <a:prstGeom prst="roundRect">
             <a:avLst>
-              <a:gd name="adj" fmla="val 10769"/>
+              <a:gd name="adj" fmla="val 10980"/>
             </a:avLst>
           </a:prstGeom>
           <a:solidFill>
@@ -2331,7 +2353,7 @@
         </p:nvSpPr>
         <p:spPr>
           <a:xfrm>
-            <a:off x="7334250" y="4714875"/>
+            <a:off x="7334250" y="5857875"/>
             <a:ext cx="4572000" cy="857250"/>
           </a:xfrm>
           <a:prstGeom prst="rect">
@@ -2348,7 +2370,7 @@
               <a:buNone/>
             </a:pPr>
             <a:r>
-              <a:rPr lang="en-US" sz="4610" dirty="0" spc="1" kern="0">
+              <a:rPr lang="en-US" sz="4500" dirty="0" spc="2" kern="0">
                 <a:solidFill>
                   <a:srgbClr val="14161C"/>
                 </a:solidFill>
@@ -2356,10 +2378,10 @@
                 <a:ea typeface="Bricolage Grotesque ExtraBold" pitchFamily="34" charset="-122"/>
                 <a:cs typeface="Bricolage Grotesque ExtraBold" pitchFamily="34" charset="-120"/>
               </a:rPr>
-              <a:t>Máy chủ</a:t>
-            </a:r>
-            <a:r>
-              <a:rPr lang="en-US" sz="4610" dirty="0" spc="-13" kern="0">
+              <a:t>Máy</a:t>
+            </a:r>
+            <a:r>
+              <a:rPr lang="en-US" sz="4500" dirty="0" spc="0" kern="0">
                 <a:solidFill>
                   <a:srgbClr val="14161C"/>
                 </a:solidFill>
@@ -2367,9 +2389,20 @@
                 <a:ea typeface="Bricolage Grotesque ExtraBold" pitchFamily="34" charset="-122"/>
                 <a:cs typeface="Bricolage Grotesque ExtraBold" pitchFamily="34" charset="-120"/>
               </a:rPr>
+              <a:t> chủ</a:t>
+            </a:r>
+            <a:r>
+              <a:rPr lang="en-US" sz="4500" dirty="0" spc="-10" kern="0">
+                <a:solidFill>
+                  <a:srgbClr val="14161C"/>
+                </a:solidFill>
+                <a:latin typeface="Bricolage Grotesque ExtraBold" pitchFamily="34" charset="0"/>
+                <a:ea typeface="Bricolage Grotesque ExtraBold" pitchFamily="34" charset="-122"/>
+                <a:cs typeface="Bricolage Grotesque ExtraBold" pitchFamily="34" charset="-120"/>
+              </a:rPr>
               <a:t> Redis</a:t>
             </a:r>
-            <a:endParaRPr lang="en-US" sz="4610" dirty="0"/>
+            <a:endParaRPr lang="en-US" sz="4500" dirty="0"/>
           </a:p>
         </p:txBody>
       </p:sp>
@@ -2381,7 +2414,7 @@
         </p:nvSpPr>
         <p:spPr>
           <a:xfrm>
-            <a:off x="7334250" y="5715000"/>
+            <a:off x="7334250" y="6858000"/>
             <a:ext cx="4572000" cy="1047750"/>
           </a:xfrm>
           <a:prstGeom prst="rect">
@@ -2483,13 +2516,13 @@
       </p:sp>
       <p:sp>
         <p:nvSpPr>
-          <p:cNvPr id="14" name="Connector line-1792370998393-595092906"/>
-          <p:cNvSpPr/>
-          <p:nvPr/>
-        </p:nvSpPr>
-        <p:spPr>
-          <a:xfrm>
-            <a:off x="12382500" y="5715000"/>
+          <p:cNvPr id="14" name="Connector line-1792371720923-547056950"/>
+          <p:cNvSpPr/>
+          <p:nvPr/>
+        </p:nvSpPr>
+        <p:spPr>
+          <a:xfrm>
+            <a:off x="12382500" y="6877050"/>
             <a:ext cx="1428750" cy="0"/>
           </a:xfrm>
           <a:prstGeom prst="line">
@@ -2514,7 +2547,7 @@
         </p:nvSpPr>
         <p:spPr>
           <a:xfrm>
-            <a:off x="13944600" y="4667250"/>
+            <a:off x="13944600" y="5829300"/>
             <a:ext cx="3429000" cy="2095500"/>
           </a:xfrm>
           <a:prstGeom prst="roundRect">
@@ -2541,7 +2574,7 @@
         </p:nvSpPr>
         <p:spPr>
           <a:xfrm>
-            <a:off x="14287500" y="4857750"/>
+            <a:off x="14287500" y="6019800"/>
             <a:ext cx="2743200" cy="762000"/>
           </a:xfrm>
           <a:prstGeom prst="rect">
@@ -2580,7 +2613,7 @@
         </p:nvSpPr>
         <p:spPr>
           <a:xfrm>
-            <a:off x="14287500" y="5715000"/>
+            <a:off x="14287500" y="6877050"/>
             <a:ext cx="2743200" cy="857250"/>
           </a:xfrm>
           <a:prstGeom prst="rect">
